--- a/presentacion/Presentacion_EP2_AV_EVENTS.pptx
+++ b/presentacion/Presentacion_EP2_AV_EVENTS.pptx
@@ -118,7 +118,7 @@
   <p:extLst>
     <p:ext uri="{521415D9-36F7-43E2-AB2F-B90AF26B5E84}">
       <p14:sectionLst xmlns:p14="http://schemas.microsoft.com/office/powerpoint/2010/main">
-        <p14:section name="Inicio" id="{923537bb-f0fe-a61c-64c0-5bd0cbfead05}">
+        <p14:section name="Inicio" id="{e9948188-aa53-c55d-329d-5b037f6c6dc1}">
           <p14:sldIdLst>
             <p14:sldId id="256"/>
             <p14:sldId id="257"/>
@@ -126,17 +126,17 @@
             <p14:sldId id="259"/>
           </p14:sldIdLst>
         </p14:section>
-        <p14:section name="Funciones" id="{3fe83e1c-d87f-8e97-4d4c-4d4d1e471e5e}">
+        <p14:section name="Funciones" id="{f8726742-650e-0835-34b2-6c9ecdb10e71}">
           <p14:sldIdLst>
             <p14:sldId id="260"/>
           </p14:sldIdLst>
         </p14:section>
-        <p14:section name="Procedimientos" id="{a85e9581-6e53-ce7a-f95b-38056f2b8ffa}">
+        <p14:section name="Procedimientos" id="{29dab7d4-d0a1-131f-0e9b-2811fab66cdf}">
           <p14:sldIdLst>
             <p14:sldId id="261"/>
           </p14:sldIdLst>
         </p14:section>
-        <p14:section name="Package y triggers" id="{c0fe6921-c749-33a1-6c59-c1c053f3f08b}">
+        <p14:section name="Package y triggers" id="{467f8008-3210-79e2-0333-417b7b70386f}">
           <p14:sldIdLst>
             <p14:sldId id="262"/>
             <p14:sldId id="263"/>
@@ -144,7 +144,7 @@
             <p14:sldId id="265"/>
           </p14:sldIdLst>
         </p14:section>
-        <p14:section name="Cierre" id="{4d330920-dc60-4eed-8a28-71484fd187f2}">
+        <p14:section name="Cierre" id="{8037766d-51a3-e91a-f910-54433fd6539b}">
           <p14:sldIdLst>
             <p14:sldId id="266"/>
             <p14:sldId id="267"/>
@@ -2822,7 +2822,7 @@
                   <a:schemeClr val="tx1"/>
                 </a:solidFill>
               </a:rPr>
-              <a:t>IVA de 19%: el caso no indica la tasa</a:t>
+              <a:t>IVA de 19%: el caso no indica la tasa (igual que en la EP1)</a:t>
             </a:r>
             <a:endParaRPr lang="en-US" sz="1600" dirty="0"/>
           </a:p>
@@ -2840,7 +2840,7 @@
                   <a:schemeClr val="tx1"/>
                 </a:solidFill>
               </a:rPr>
-              <a:t>Clasificación ALTO / MEDIO / BAJO por ingreso del mes</a:t>
+              <a:t>ALTO / MEDIO / BAJO con los mismos tramos de la EP1</a:t>
             </a:r>
             <a:endParaRPr lang="en-US" sz="1600" dirty="0"/>
           </a:p>
@@ -2890,7 +2890,7 @@
                 <a:gridCol w="2377440"/>
                 <a:gridCol w="4206240"/>
               </a:tblGrid>
-              <a:tr h="502920">
+              <a:tr h="457200">
                 <a:tc>
                   <a:txBody>
                     <a:bodyPr/>
@@ -3014,7 +3014,7 @@
                   </a:tcPr>
                 </a:tc>
               </a:tr>
-              <a:tr h="502920">
+              <a:tr h="457200">
                 <a:tc>
                   <a:txBody>
                     <a:bodyPr/>
@@ -3139,7 +3139,7 @@
                   </a:tcPr>
                 </a:tc>
               </a:tr>
-              <a:tr h="502920">
+              <a:tr h="457200">
                 <a:tc>
                   <a:txBody>
                     <a:bodyPr/>
@@ -3219,7 +3219,7 @@
                             <a:schemeClr val="tx1"/>
                           </a:solidFill>
                         </a:rPr>
-                        <a:t>Filtrar por mes y año; viene del script del caso</a:t>
+                        <a:t>Filtrar por mes y año; el script del caso lo usa con YEAR</a:t>
                       </a:r>
                       <a:endParaRPr lang="en-US" sz="1400" dirty="0"/>
                     </a:p>
@@ -3264,7 +3264,132 @@
                   </a:tcPr>
                 </a:tc>
               </a:tr>
-              <a:tr h="502920">
+              <a:tr h="457200">
+                <a:tc>
+                  <a:txBody>
+                    <a:bodyPr/>
+                    <a:lstStyle/>
+                    <a:p>
+                      <a:pPr indent="0" marL="0">
+                        <a:buNone/>
+                      </a:pPr>
+                      <a:r>
+                        <a:rPr lang="en-US" sz="1400" dirty="0">
+                          <a:solidFill>
+                            <a:schemeClr val="tx1"/>
+                          </a:solidFill>
+                          <a:latin typeface="Courier New" pitchFamily="34" charset="0"/>
+                          <a:ea typeface="Courier New" pitchFamily="34" charset="-122"/>
+                          <a:cs typeface="Courier New" pitchFamily="34" charset="-120"/>
+                        </a:rPr>
+                        <a:t>&lt;&gt;</a:t>
+                      </a:r>
+                      <a:endParaRPr lang="en-US" sz="1400" dirty="0">
+                        <a:latin typeface="Courier New" charset="0"/>
+                        <a:ea typeface="Courier New" charset="0"/>
+                        <a:cs typeface="Courier New" charset="0"/>
+                      </a:endParaRPr>
+                    </a:p>
+                  </a:txBody>
+                  <a:tcPr marL="91440" marR="91440" marT="45720" marB="45720">
+                    <a:lnL w="6350" cap="flat" cmpd="sng" algn="ctr">
+                      <a:solidFill>
+                        <a:srgbClr val="C9D3DF"/>
+                      </a:solidFill>
+                      <a:prstDash val="solid"/>
+                      <a:round/>
+                      <a:headEnd type="none" w="med" len="med"/>
+                      <a:tailEnd type="none" w="med" len="med"/>
+                    </a:lnL>
+                    <a:lnR w="6350" cap="flat" cmpd="sng" algn="ctr">
+                      <a:solidFill>
+                        <a:srgbClr val="C9D3DF"/>
+                      </a:solidFill>
+                      <a:prstDash val="solid"/>
+                      <a:round/>
+                      <a:headEnd type="none" w="med" len="med"/>
+                      <a:tailEnd type="none" w="med" len="med"/>
+                    </a:lnR>
+                    <a:lnT w="6350" cap="flat" cmpd="sng" algn="ctr">
+                      <a:solidFill>
+                        <a:srgbClr val="C9D3DF"/>
+                      </a:solidFill>
+                      <a:prstDash val="solid"/>
+                      <a:round/>
+                      <a:headEnd type="none" w="med" len="med"/>
+                      <a:tailEnd type="none" w="med" len="med"/>
+                    </a:lnT>
+                    <a:lnB w="6350" cap="flat" cmpd="sng" algn="ctr">
+                      <a:solidFill>
+                        <a:srgbClr val="C9D3DF"/>
+                      </a:solidFill>
+                      <a:prstDash val="solid"/>
+                      <a:round/>
+                      <a:headEnd type="none" w="med" len="med"/>
+                      <a:tailEnd type="none" w="med" len="med"/>
+                    </a:lnB>
+                  </a:tcPr>
+                </a:tc>
+                <a:tc>
+                  <a:txBody>
+                    <a:bodyPr/>
+                    <a:lstStyle/>
+                    <a:p>
+                      <a:pPr indent="0" marL="0">
+                        <a:buNone/>
+                      </a:pPr>
+                      <a:r>
+                        <a:rPr lang="en-US" sz="1400" dirty="0">
+                          <a:solidFill>
+                            <a:schemeClr val="tx1"/>
+                          </a:solidFill>
+                        </a:rPr>
+                        <a:t>"Distinto de" en el trigger de validación</a:t>
+                      </a:r>
+                      <a:endParaRPr lang="en-US" sz="1400" dirty="0"/>
+                    </a:p>
+                  </a:txBody>
+                  <a:tcPr marL="91440" marR="91440" marT="45720" marB="45720">
+                    <a:lnL w="6350" cap="flat" cmpd="sng" algn="ctr">
+                      <a:solidFill>
+                        <a:srgbClr val="C9D3DF"/>
+                      </a:solidFill>
+                      <a:prstDash val="solid"/>
+                      <a:round/>
+                      <a:headEnd type="none" w="med" len="med"/>
+                      <a:tailEnd type="none" w="med" len="med"/>
+                    </a:lnL>
+                    <a:lnR w="6350" cap="flat" cmpd="sng" algn="ctr">
+                      <a:solidFill>
+                        <a:srgbClr val="C9D3DF"/>
+                      </a:solidFill>
+                      <a:prstDash val="solid"/>
+                      <a:round/>
+                      <a:headEnd type="none" w="med" len="med"/>
+                      <a:tailEnd type="none" w="med" len="med"/>
+                    </a:lnR>
+                    <a:lnT w="6350" cap="flat" cmpd="sng" algn="ctr">
+                      <a:solidFill>
+                        <a:srgbClr val="C9D3DF"/>
+                      </a:solidFill>
+                      <a:prstDash val="solid"/>
+                      <a:round/>
+                      <a:headEnd type="none" w="med" len="med"/>
+                      <a:tailEnd type="none" w="med" len="med"/>
+                    </a:lnT>
+                    <a:lnB w="6350" cap="flat" cmpd="sng" algn="ctr">
+                      <a:solidFill>
+                        <a:srgbClr val="C9D3DF"/>
+                      </a:solidFill>
+                      <a:prstDash val="solid"/>
+                      <a:round/>
+                      <a:headEnd type="none" w="med" len="med"/>
+                      <a:tailEnd type="none" w="med" len="med"/>
+                    </a:lnB>
+                  </a:tcPr>
+                </a:tc>
+              </a:tr>
+              <a:tr h="457200">
                 <a:tc>
                   <a:txBody>
                     <a:bodyPr/>
@@ -3389,7 +3514,7 @@
                   </a:tcPr>
                 </a:tc>
               </a:tr>
-              <a:tr h="502920">
+              <a:tr h="457200">
                 <a:tc>
                   <a:txBody>
                     <a:bodyPr/>
@@ -3514,7 +3639,7 @@
                   </a:tcPr>
                 </a:tc>
               </a:tr>
-              <a:tr h="502920">
+              <a:tr h="457200">
                 <a:tc>
                   <a:txBody>
                     <a:bodyPr/>
@@ -3651,7 +3776,7 @@
         </p:nvSpPr>
         <p:spPr>
           <a:xfrm>
-            <a:off x="5029200" y="4663440"/>
+            <a:off x="5029200" y="5120640"/>
             <a:ext cx="6583680" cy="457200"/>
           </a:xfrm>
           <a:prstGeom prst="rect">
@@ -9048,7 +9173,7 @@
                   <a:schemeClr val="tx2"/>
                 </a:solidFill>
               </a:rPr>
-              <a:t>Una función pública se puede usar en SQL; una privada no</a:t>
+              <a:t>Lo público se llama desde fuera, incluso en SQL; lo privado no</a:t>
             </a:r>
             <a:endParaRPr lang="en-US" sz="1800" dirty="0"/>
           </a:p>
@@ -10327,7 +10452,7 @@
                             <a:schemeClr val="tx1"/>
                           </a:solidFill>
                         </a:rPr>
-                        <a:t>≥ $4.000.000</a:t>
+                        <a:t>≥ $3.000.000</a:t>
                       </a:r>
                       <a:endParaRPr lang="en-US" sz="1400" dirty="0"/>
                     </a:p>
@@ -10445,7 +10570,7 @@
                             <a:schemeClr val="tx1"/>
                           </a:solidFill>
                         </a:rPr>
-                        <a:t>≥ $3.000.000</a:t>
+                        <a:t>≥ $1.000.000</a:t>
                       </a:r>
                       <a:endParaRPr lang="en-US" sz="1400" dirty="0"/>
                     </a:p>
@@ -10563,7 +10688,7 @@
                             <a:schemeClr val="tx1"/>
                           </a:solidFill>
                         </a:rPr>
-                        <a:t>menos de $3.000.000</a:t>
+                        <a:t>menos de $1.000.000</a:t>
                       </a:r>
                       <a:endParaRPr lang="en-US" sz="1400" dirty="0"/>
                     </a:p>

--- a/presentacion/Presentacion_EP2_AV_EVENTS.pptx
+++ b/presentacion/Presentacion_EP2_AV_EVENTS.pptx
@@ -912,7 +912,7 @@
           <a:p>
             <a:r>
               <a:rPr lang="en-US" dirty="0"/>
-              <a:t>Martín. Ver guion.md, diapositiva 10 y sección 3.</a:t>
+              <a:t>Martín. Ver guion.md, diapositiva 10. Al terminar, Alt+Tab a SQL Developer: demostración final (Parte 4).</a:t>
             </a:r>
             <a:endParaRPr lang="en-US" dirty="0"/>
           </a:p>
@@ -1088,7 +1088,7 @@
           <a:p>
             <a:r>
               <a:rPr lang="en-US" dirty="0"/>
-              <a:t>Los tres. Ver guion.md, sección 5.</a:t>
+              <a:t>Los tres. Ver guion.md, sección 6 (respuestas a preguntas).</a:t>
             </a:r>
             <a:endParaRPr lang="en-US" dirty="0"/>
           </a:p>
@@ -1440,7 +1440,7 @@
           <a:p>
             <a:r>
               <a:rPr lang="en-US" dirty="0"/>
-              <a:t>Javier. Mostrar sql/02_funciones.sql y ejecutar 06_demo.sql líneas 11 y 14-21. Ver guion.md, diapositiva 5.</a:t>
+              <a:t>Javier. Mostrar sql/02_funciones.sql sin ejecutar. Ver guion.md, Parte 1, diapositiva 5.</a:t>
             </a:r>
             <a:endParaRPr lang="en-US" dirty="0"/>
           </a:p>
@@ -1528,7 +1528,7 @@
           <a:p>
             <a:r>
               <a:rPr lang="en-US" dirty="0"/>
-              <a:t>Gustavo. Mostrar sql/03_procedimientos.sql y ejecutar 06_demo.sql líneas 24-36. Ver guion.md, diapositiva 6.</a:t>
+              <a:t>Gustavo. Mostrar sql/03_procedimientos.sql sin ejecutar. Ver guion.md, Parte 2, diapositiva 6.</a:t>
             </a:r>
             <a:endParaRPr lang="en-US" dirty="0"/>
           </a:p>
@@ -1616,7 +1616,7 @@
           <a:p>
             <a:r>
               <a:rPr lang="en-US" dirty="0"/>
-              <a:t>Martín. Mostrar sql/04_package.sql. Ejecutar 06_demo.sql línea 40 y la Prueba 12. Ver guion.md, diapositiva 7.</a:t>
+              <a:t>Martín. Mostrar sql/04_package.sql sin ejecutar. Ver guion.md, Parte 3, diapositiva 7.</a:t>
             </a:r>
             <a:endParaRPr lang="en-US" dirty="0"/>
           </a:p>
@@ -1704,7 +1704,7 @@
           <a:p>
             <a:r>
               <a:rPr lang="en-US" dirty="0"/>
-              <a:t>Martín. Mostrar sql/05_triggers.sql y ejecutar 06_demo.sql líneas 43-56 y la Prueba 9. Ver guion.md, diapositiva 8.</a:t>
+              <a:t>Martín. Mostrar sql/05_triggers.sql sin ejecutar. Ver guion.md, Parte 3, diapositiva 8.</a:t>
             </a:r>
             <a:endParaRPr lang="en-US" dirty="0"/>
           </a:p>
@@ -1792,7 +1792,7 @@
           <a:p>
             <a:r>
               <a:rPr lang="en-US" dirty="0"/>
-              <a:t>Martín. Ejecutar 06_demo.sql línea 42 (SELECT * FROM resumen_arriendo_tipo). Ver guion.md, diapositiva 9.</a:t>
+              <a:t>Martín. Solo la diapositiva; el resumen se ejecuta en la demostración final. Ver guion.md, diapositiva 9.</a:t>
             </a:r>
             <a:endParaRPr lang="en-US" dirty="0"/>
           </a:p>
